--- a/exports/10_full_deck_showcase.pptx
+++ b/exports/10_full_deck_showcase.pptx
@@ -508,7 +508,8 @@
           <a:p>
             <a:r>
               <a:rPr lang="en-US" dirty="0"/>
-              <a:t>Introduction to Slidequill.</a:t>
+              <a:t>Introduction to Slidequill.
+Source: 10_full_deck_showcase.pdf</a:t>
             </a:r>
             <a:endParaRPr lang="en-US" dirty="0"/>
           </a:p>
@@ -596,7 +597,8 @@
           <a:p>
             <a:r>
               <a:rPr lang="en-US" dirty="0"/>
-              <a:t>Key market pain points.</a:t>
+              <a:t>Key market pain points.
+Source: 10_full_deck_showcase.pdf</a:t>
             </a:r>
             <a:endParaRPr lang="en-US" dirty="0"/>
           </a:p>
@@ -684,7 +686,8 @@
           <a:p>
             <a:r>
               <a:rPr lang="en-US" dirty="0"/>
-              <a:t>Real metrics from early user cohorts.</a:t>
+              <a:t>Real metrics from early user cohorts.
+Source: 10_full_deck_showcase.pdf</a:t>
             </a:r>
             <a:endParaRPr lang="en-US" dirty="0"/>
           </a:p>
@@ -772,7 +775,8 @@
           <a:p>
             <a:r>
               <a:rPr lang="en-US" dirty="0"/>
-              <a:t>The document-to-deck pipeline.</a:t>
+              <a:t>The document-to-deck pipeline.
+Source: 10_full_deck_showcase.pdf</a:t>
             </a:r>
             <a:endParaRPr lang="en-US" dirty="0"/>
           </a:p>
@@ -860,7 +864,8 @@
           <a:p>
             <a:r>
               <a:rPr lang="en-US" dirty="0"/>
-              <a:t>Slidequill vs traditional AI deck generators.</a:t>
+              <a:t>Slidequill vs traditional AI deck generators.
+Source: 10_full_deck_showcase.pdf</a:t>
             </a:r>
             <a:endParaRPr lang="en-US" dirty="0"/>
           </a:p>
@@ -948,7 +953,8 @@
           <a:p>
             <a:r>
               <a:rPr lang="en-US" dirty="0"/>
-              <a:t>Praise from early customer.</a:t>
+              <a:t>Praise from early customer.
+Source: 10_full_deck_showcase.pdf</a:t>
             </a:r>
             <a:endParaRPr lang="en-US" dirty="0"/>
           </a:p>
@@ -1036,7 +1042,8 @@
           <a:p>
             <a:r>
               <a:rPr lang="en-US" dirty="0"/>
-              <a:t>Call to action.</a:t>
+              <a:t>Call to action.
+Source: 10_full_deck_showcase.pdf</a:t>
             </a:r>
             <a:endParaRPr lang="en-US" dirty="0"/>
           </a:p>
